--- a/ppt_engine/templates/solution_fixed_modules/首页.pptx
+++ b/ppt_engine/templates/solution_fixed_modules/首页.pptx
@@ -3125,7 +3125,7 @@
         </p:nvSpPr>
         <p:spPr>
           <a:xfrm>
-            <a:off x="1728757" y="2356842"/>
+            <a:off x="1728771" y="2356842"/>
             <a:ext cx="8064531" cy="584775"/>
           </a:xfrm>
           <a:prstGeom prst="rect">
@@ -3171,6 +3171,113 @@
           </a:p>
         </p:txBody>
       </p:sp>
+      <p:grpSp>
+        <p:nvGrpSpPr>
+          <p:cNvPr id="15" name="组合 14">
+            <a:extLst>
+              <a:ext uri="{FF2B5EF4-FFF2-40B4-BE49-F238E27FC236}">
+                <a16:creationId xmlns:a16="http://schemas.microsoft.com/office/drawing/2014/main" id="{FF1BB8CB-D51A-5638-A396-B5179A2A8294}"/>
+              </a:ext>
+            </a:extLst>
+          </p:cNvPr>
+          <p:cNvGrpSpPr/>
+          <p:nvPr/>
+        </p:nvGrpSpPr>
+        <p:grpSpPr>
+          <a:xfrm>
+            <a:off x="9577302" y="215877"/>
+            <a:ext cx="1695878" cy="706616"/>
+            <a:chOff x="9577302" y="1165376"/>
+            <a:chExt cx="1695878" cy="706616"/>
+          </a:xfrm>
+        </p:grpSpPr>
+        <p:sp>
+          <p:nvSpPr>
+            <p:cNvPr id="12" name="矩形 11">
+              <a:extLst>
+                <a:ext uri="{FF2B5EF4-FFF2-40B4-BE49-F238E27FC236}">
+                  <a16:creationId xmlns:a16="http://schemas.microsoft.com/office/drawing/2014/main" id="{651E5482-9E1C-037D-3B70-425DAA6EFE7D}"/>
+                </a:ext>
+              </a:extLst>
+            </p:cNvPr>
+            <p:cNvSpPr/>
+            <p:nvPr/>
+          </p:nvSpPr>
+          <p:spPr>
+            <a:xfrm>
+              <a:off x="9721312" y="1295952"/>
+              <a:ext cx="1440100" cy="432030"/>
+            </a:xfrm>
+            <a:prstGeom prst="rect">
+              <a:avLst/>
+            </a:prstGeom>
+            <a:noFill/>
+            <a:ln>
+              <a:noFill/>
+            </a:ln>
+          </p:spPr>
+          <p:style>
+            <a:lnRef idx="2">
+              <a:schemeClr val="accent1">
+                <a:shade val="15000"/>
+              </a:schemeClr>
+            </a:lnRef>
+            <a:fillRef idx="1">
+              <a:schemeClr val="accent1"/>
+            </a:fillRef>
+            <a:effectRef idx="0">
+              <a:schemeClr val="accent1"/>
+            </a:effectRef>
+            <a:fontRef idx="minor">
+              <a:schemeClr val="lt1"/>
+            </a:fontRef>
+          </p:style>
+          <p:txBody>
+            <a:bodyPr rtlCol="0" anchor="ctr"/>
+            <a:lstStyle/>
+            <a:p>
+              <a:pPr algn="ctr"/>
+              <a:endParaRPr lang="zh-CN" altLang="en-US"/>
+            </a:p>
+          </p:txBody>
+        </p:sp>
+        <p:pic>
+          <p:nvPicPr>
+            <p:cNvPr id="14" name="图片 13">
+              <a:extLst>
+                <a:ext uri="{FF2B5EF4-FFF2-40B4-BE49-F238E27FC236}">
+                  <a16:creationId xmlns:a16="http://schemas.microsoft.com/office/drawing/2014/main" id="{A7E51AE8-93C1-760A-9646-76C900E601E1}"/>
+                </a:ext>
+              </a:extLst>
+            </p:cNvPr>
+            <p:cNvPicPr>
+              <a:picLocks noChangeAspect="1"/>
+            </p:cNvPicPr>
+            <p:nvPr/>
+          </p:nvPicPr>
+          <p:blipFill>
+            <a:blip r:embed="rId6">
+              <a:extLst>
+                <a:ext uri="{28A0092B-C50C-407E-A947-70E740481C1C}">
+                  <a14:useLocalDpi xmlns:a14="http://schemas.microsoft.com/office/drawing/2010/main" val="0"/>
+                </a:ext>
+              </a:extLst>
+            </a:blip>
+            <a:stretch>
+              <a:fillRect/>
+            </a:stretch>
+          </p:blipFill>
+          <p:spPr>
+            <a:xfrm>
+              <a:off x="9577302" y="1165376"/>
+              <a:ext cx="1695878" cy="706616"/>
+            </a:xfrm>
+            <a:prstGeom prst="rect">
+              <a:avLst/>
+            </a:prstGeom>
+          </p:spPr>
+        </p:pic>
+      </p:grpSp>
     </p:spTree>
     <p:custDataLst>
       <p:tags r:id="rId1"/>
